--- a/불편신고/SANDI_SB_FO_홈_V4.2_불편신고_사용자 검색시 화면.pptx
+++ b/불편신고/SANDI_SB_FO_홈_V4.2_불편신고_사용자 검색시 화면.pptx
@@ -3934,6 +3934,36 @@
       </p:grpSpPr>
       <p:pic>
         <p:nvPicPr>
+          <p:cNvPr id="14" name="그림 13">
+            <a:extLst>
+              <a:ext uri="{FF2B5EF4-FFF2-40B4-BE49-F238E27FC236}">
+                <a16:creationId xmlns:a16="http://schemas.microsoft.com/office/drawing/2014/main" id="{C8851CE4-1B81-9180-0093-D9CBB497AD66}"/>
+              </a:ext>
+            </a:extLst>
+          </p:cNvPr>
+          <p:cNvPicPr>
+            <a:picLocks noChangeAspect="1"/>
+          </p:cNvPicPr>
+          <p:nvPr/>
+        </p:nvPicPr>
+        <p:blipFill>
+          <a:blip r:embed="rId3"/>
+          <a:stretch>
+            <a:fillRect/>
+          </a:stretch>
+        </p:blipFill>
+        <p:spPr>
+          <a:xfrm>
+            <a:off x="685931" y="1702248"/>
+            <a:ext cx="2188654" cy="4737003"/>
+          </a:xfrm>
+          <a:prstGeom prst="rect">
+            <a:avLst/>
+          </a:prstGeom>
+        </p:spPr>
+      </p:pic>
+      <p:pic>
+        <p:nvPicPr>
           <p:cNvPr id="3" name="그림 2">
             <a:extLst>
               <a:ext uri="{FF2B5EF4-FFF2-40B4-BE49-F238E27FC236}">
@@ -3947,7 +3977,7 @@
           <p:nvPr/>
         </p:nvPicPr>
         <p:blipFill>
-          <a:blip r:embed="rId3">
+          <a:blip r:embed="rId4">
             <a:extLst>
               <a:ext uri="{28A0092B-C50C-407E-A947-70E740481C1C}">
                 <a14:useLocalDpi xmlns:a14="http://schemas.microsoft.com/office/drawing/2010/main" val="0"/>
@@ -4837,7 +4867,7 @@
           <p:nvPr/>
         </p:nvPicPr>
         <p:blipFill>
-          <a:blip r:embed="rId4"/>
+          <a:blip r:embed="rId5"/>
           <a:stretch>
             <a:fillRect/>
           </a:stretch>
@@ -6167,173 +6197,6 @@
       </p:sp>
       <p:sp>
         <p:nvSpPr>
-          <p:cNvPr id="18" name="직사각형 17">
-            <a:extLst>
-              <a:ext uri="{FF2B5EF4-FFF2-40B4-BE49-F238E27FC236}">
-                <a16:creationId xmlns:a16="http://schemas.microsoft.com/office/drawing/2014/main" id="{EAEF56A0-B49A-A817-7819-6E8F89D3DD22}"/>
-              </a:ext>
-            </a:extLst>
-          </p:cNvPr>
-          <p:cNvSpPr/>
-          <p:nvPr/>
-        </p:nvSpPr>
-        <p:spPr>
-          <a:xfrm>
-            <a:off x="715718" y="4287330"/>
-            <a:ext cx="2256082" cy="400664"/>
-          </a:xfrm>
-          <a:prstGeom prst="rect">
-            <a:avLst/>
-          </a:prstGeom>
-          <a:solidFill>
-            <a:schemeClr val="bg1"/>
-          </a:solidFill>
-          <a:ln>
-            <a:noFill/>
-          </a:ln>
-        </p:spPr>
-        <p:style>
-          <a:lnRef idx="2">
-            <a:schemeClr val="accent1">
-              <a:shade val="15000"/>
-            </a:schemeClr>
-          </a:lnRef>
-          <a:fillRef idx="1">
-            <a:schemeClr val="accent1"/>
-          </a:fillRef>
-          <a:effectRef idx="0">
-            <a:schemeClr val="accent1"/>
-          </a:effectRef>
-          <a:fontRef idx="minor">
-            <a:schemeClr val="lt1"/>
-          </a:fontRef>
-        </p:style>
-        <p:txBody>
-          <a:bodyPr rtlCol="0" anchor="ctr"/>
-          <a:lstStyle/>
-          <a:p>
-            <a:pPr algn="ctr"/>
-            <a:endParaRPr lang="ko-KR" altLang="en-US"/>
-          </a:p>
-        </p:txBody>
-      </p:sp>
-      <p:sp>
-        <p:nvSpPr>
-          <p:cNvPr id="19" name="직사각형 18">
-            <a:extLst>
-              <a:ext uri="{FF2B5EF4-FFF2-40B4-BE49-F238E27FC236}">
-                <a16:creationId xmlns:a16="http://schemas.microsoft.com/office/drawing/2014/main" id="{4017E761-4067-A1CF-E967-F897BC25CD15}"/>
-              </a:ext>
-            </a:extLst>
-          </p:cNvPr>
-          <p:cNvSpPr/>
-          <p:nvPr/>
-        </p:nvSpPr>
-        <p:spPr>
-          <a:xfrm>
-            <a:off x="715718" y="3813185"/>
-            <a:ext cx="782994" cy="190500"/>
-          </a:xfrm>
-          <a:prstGeom prst="rect">
-            <a:avLst/>
-          </a:prstGeom>
-          <a:solidFill>
-            <a:schemeClr val="bg1"/>
-          </a:solidFill>
-          <a:ln>
-            <a:noFill/>
-          </a:ln>
-        </p:spPr>
-        <p:style>
-          <a:lnRef idx="2">
-            <a:schemeClr val="accent1">
-              <a:shade val="15000"/>
-            </a:schemeClr>
-          </a:lnRef>
-          <a:fillRef idx="1">
-            <a:schemeClr val="accent1"/>
-          </a:fillRef>
-          <a:effectRef idx="0">
-            <a:schemeClr val="accent1"/>
-          </a:effectRef>
-          <a:fontRef idx="minor">
-            <a:schemeClr val="lt1"/>
-          </a:fontRef>
-        </p:style>
-        <p:txBody>
-          <a:bodyPr lIns="0" tIns="0" rIns="0" bIns="0" rtlCol="0" anchor="ctr"/>
-          <a:lstStyle/>
-          <a:p>
-            <a:pPr algn="ctr"/>
-            <a:r>
-              <a:rPr lang="ko-KR" altLang="en-US" sz="1000" dirty="0">
-                <a:solidFill>
-                  <a:schemeClr val="tx1"/>
-                </a:solidFill>
-              </a:rPr>
-              <a:t>추천서비스</a:t>
-            </a:r>
-          </a:p>
-        </p:txBody>
-      </p:sp>
-      <p:sp>
-        <p:nvSpPr>
-          <p:cNvPr id="20" name="직사각형 19">
-            <a:extLst>
-              <a:ext uri="{FF2B5EF4-FFF2-40B4-BE49-F238E27FC236}">
-                <a16:creationId xmlns:a16="http://schemas.microsoft.com/office/drawing/2014/main" id="{50E0320B-886D-22D7-6D40-D8C2D47CEADC}"/>
-              </a:ext>
-            </a:extLst>
-          </p:cNvPr>
-          <p:cNvSpPr/>
-          <p:nvPr/>
-        </p:nvSpPr>
-        <p:spPr>
-          <a:xfrm>
-            <a:off x="715717" y="4050257"/>
-            <a:ext cx="1232448" cy="190500"/>
-          </a:xfrm>
-          <a:prstGeom prst="rect">
-            <a:avLst/>
-          </a:prstGeom>
-          <a:solidFill>
-            <a:schemeClr val="bg1"/>
-          </a:solidFill>
-          <a:ln>
-            <a:noFill/>
-          </a:ln>
-        </p:spPr>
-        <p:style>
-          <a:lnRef idx="2">
-            <a:schemeClr val="accent1">
-              <a:shade val="15000"/>
-            </a:schemeClr>
-          </a:lnRef>
-          <a:fillRef idx="1">
-            <a:schemeClr val="accent1"/>
-          </a:fillRef>
-          <a:effectRef idx="0">
-            <a:schemeClr val="accent1"/>
-          </a:effectRef>
-          <a:fontRef idx="minor">
-            <a:schemeClr val="lt1"/>
-          </a:fontRef>
-        </p:style>
-        <p:txBody>
-          <a:bodyPr lIns="0" tIns="0" rIns="0" bIns="0" rtlCol="0" anchor="ctr"/>
-          <a:lstStyle/>
-          <a:p>
-            <a:pPr algn="ctr"/>
-            <a:endParaRPr lang="ko-KR" altLang="en-US" sz="700" dirty="0">
-              <a:solidFill>
-                <a:schemeClr val="tx1"/>
-              </a:solidFill>
-            </a:endParaRPr>
-          </a:p>
-        </p:txBody>
-      </p:sp>
-      <p:sp>
-        <p:nvSpPr>
           <p:cNvPr id="23" name="타원 22">
             <a:extLst>
               <a:ext uri="{FF2B5EF4-FFF2-40B4-BE49-F238E27FC236}">
@@ -6386,57 +6249,6 @@
             <a:endParaRPr lang="ko-KR" altLang="en-US" sz="1000" dirty="0">
               <a:latin typeface="+mj-lt"/>
             </a:endParaRPr>
-          </a:p>
-        </p:txBody>
-      </p:sp>
-      <p:sp>
-        <p:nvSpPr>
-          <p:cNvPr id="24" name="사각형: 둥근 모서리 23">
-            <a:extLst>
-              <a:ext uri="{FF2B5EF4-FFF2-40B4-BE49-F238E27FC236}">
-                <a16:creationId xmlns:a16="http://schemas.microsoft.com/office/drawing/2014/main" id="{9BBD8E22-505A-DF59-3416-089DC035BA92}"/>
-              </a:ext>
-            </a:extLst>
-          </p:cNvPr>
-          <p:cNvSpPr/>
-          <p:nvPr/>
-        </p:nvSpPr>
-        <p:spPr>
-          <a:xfrm>
-            <a:off x="840983" y="4020659"/>
-            <a:ext cx="802994" cy="179895"/>
-          </a:xfrm>
-          <a:prstGeom prst="roundRect">
-            <a:avLst>
-              <a:gd name="adj" fmla="val 50000"/>
-            </a:avLst>
-          </a:prstGeom>
-        </p:spPr>
-        <p:style>
-          <a:lnRef idx="2">
-            <a:schemeClr val="accent1">
-              <a:shade val="15000"/>
-            </a:schemeClr>
-          </a:lnRef>
-          <a:fillRef idx="1">
-            <a:schemeClr val="accent1"/>
-          </a:fillRef>
-          <a:effectRef idx="0">
-            <a:schemeClr val="accent1"/>
-          </a:effectRef>
-          <a:fontRef idx="minor">
-            <a:schemeClr val="lt1"/>
-          </a:fontRef>
-        </p:style>
-        <p:txBody>
-          <a:bodyPr rtlCol="0" anchor="ctr"/>
-          <a:lstStyle/>
-          <a:p>
-            <a:pPr algn="ctr"/>
-            <a:r>
-              <a:rPr lang="ko-KR" altLang="en-US" sz="800" dirty="0"/>
-              <a:t>기타문의</a:t>
-            </a:r>
           </a:p>
         </p:txBody>
       </p:sp>
@@ -6626,7 +6438,7 @@
           <p:nvPr/>
         </p:nvPicPr>
         <p:blipFill>
-          <a:blip r:embed="rId5">
+          <a:blip r:embed="rId6">
             <a:extLst>
               <a:ext uri="{28A0092B-C50C-407E-A947-70E740481C1C}">
                 <a14:useLocalDpi xmlns:a14="http://schemas.microsoft.com/office/drawing/2010/main" val="0"/>
@@ -6639,7 +6451,7 @@
         </p:blipFill>
         <p:spPr>
           <a:xfrm>
-            <a:off x="733226" y="1702248"/>
+            <a:off x="-2556049" y="1702248"/>
             <a:ext cx="2184864" cy="4736652"/>
           </a:xfrm>
           <a:prstGeom prst="rect">
@@ -6662,7 +6474,7 @@
           <p:nvPr/>
         </p:nvPicPr>
         <p:blipFill>
-          <a:blip r:embed="rId6">
+          <a:blip r:embed="rId7">
             <a:extLst>
               <a:ext uri="{28A0092B-C50C-407E-A947-70E740481C1C}">
                 <a14:useLocalDpi xmlns:a14="http://schemas.microsoft.com/office/drawing/2010/main" val="0"/>
@@ -6705,7 +6517,7 @@
           <p:nvPr/>
         </p:nvPicPr>
         <p:blipFill>
-          <a:blip r:embed="rId7">
+          <a:blip r:embed="rId8">
             <a:extLst>
               <a:ext uri="{28A0092B-C50C-407E-A947-70E740481C1C}">
                 <a14:useLocalDpi xmlns:a14="http://schemas.microsoft.com/office/drawing/2010/main" val="0"/>
@@ -6802,7 +6614,7 @@
           <p:nvPr/>
         </p:nvPicPr>
         <p:blipFill>
-          <a:blip r:embed="rId8"/>
+          <a:blip r:embed="rId9"/>
           <a:stretch>
             <a:fillRect/>
           </a:stretch>
@@ -7012,10 +6824,10 @@
       </p:grpSpPr>
       <p:pic>
         <p:nvPicPr>
-          <p:cNvPr id="74" name="그림 73">
+          <p:cNvPr id="27" name="그림 26">
             <a:extLst>
               <a:ext uri="{FF2B5EF4-FFF2-40B4-BE49-F238E27FC236}">
-                <a16:creationId xmlns:a16="http://schemas.microsoft.com/office/drawing/2014/main" id="{A5F2ABE1-0DC1-881B-D944-5FD1AC71164B}"/>
+                <a16:creationId xmlns:a16="http://schemas.microsoft.com/office/drawing/2014/main" id="{A5647E08-5B67-D05A-61A5-38EEFE7D24E6}"/>
               </a:ext>
             </a:extLst>
           </p:cNvPr>
@@ -7032,45 +6844,8 @@
         </p:blipFill>
         <p:spPr>
           <a:xfrm>
-            <a:off x="3517074" y="1663669"/>
-            <a:ext cx="2261812" cy="4694327"/>
-          </a:xfrm>
-          <a:prstGeom prst="rect">
-            <a:avLst/>
-          </a:prstGeom>
-        </p:spPr>
-      </p:pic>
-      <p:pic>
-        <p:nvPicPr>
-          <p:cNvPr id="3" name="그림 2">
-            <a:extLst>
-              <a:ext uri="{FF2B5EF4-FFF2-40B4-BE49-F238E27FC236}">
-                <a16:creationId xmlns:a16="http://schemas.microsoft.com/office/drawing/2014/main" id="{C5C58DB2-D6F4-2CE0-4EE6-175C5705EECE}"/>
-              </a:ext>
-            </a:extLst>
-          </p:cNvPr>
-          <p:cNvPicPr>
-            <a:picLocks noChangeAspect="1"/>
-          </p:cNvPicPr>
-          <p:nvPr/>
-        </p:nvPicPr>
-        <p:blipFill>
-          <a:blip r:embed="rId4">
-            <a:extLst>
-              <a:ext uri="{28A0092B-C50C-407E-A947-70E740481C1C}">
-                <a14:useLocalDpi xmlns:a14="http://schemas.microsoft.com/office/drawing/2010/main" val="0"/>
-              </a:ext>
-            </a:extLst>
-          </a:blip>
-          <a:srcRect l="27310" t="14186" r="34324" b="13499"/>
-          <a:stretch>
-            <a:fillRect/>
-          </a:stretch>
-        </p:blipFill>
-        <p:spPr>
-          <a:xfrm>
-            <a:off x="479361" y="1482437"/>
-            <a:ext cx="2682875" cy="5056791"/>
+            <a:off x="686844" y="1766985"/>
+            <a:ext cx="2267909" cy="4694327"/>
           </a:xfrm>
           <a:prstGeom prst="rect">
             <a:avLst/>
@@ -7092,6 +6867,88 @@
           <p:nvPr/>
         </p:nvPicPr>
         <p:blipFill>
+          <a:blip r:embed="rId4"/>
+          <a:stretch>
+            <a:fillRect/>
+          </a:stretch>
+        </p:blipFill>
+        <p:spPr>
+          <a:xfrm>
+            <a:off x="-3108627" y="5924926"/>
+            <a:ext cx="2267909" cy="4694327"/>
+          </a:xfrm>
+          <a:prstGeom prst="rect">
+            <a:avLst/>
+          </a:prstGeom>
+        </p:spPr>
+      </p:pic>
+      <p:sp>
+        <p:nvSpPr>
+          <p:cNvPr id="15" name="직사각형 14">
+            <a:extLst>
+              <a:ext uri="{FF2B5EF4-FFF2-40B4-BE49-F238E27FC236}">
+                <a16:creationId xmlns:a16="http://schemas.microsoft.com/office/drawing/2014/main" id="{C4DF37E0-B56E-4D40-D716-DBA10315CFA2}"/>
+              </a:ext>
+            </a:extLst>
+          </p:cNvPr>
+          <p:cNvSpPr/>
+          <p:nvPr/>
+        </p:nvSpPr>
+        <p:spPr>
+          <a:xfrm>
+            <a:off x="-3011591" y="6517602"/>
+            <a:ext cx="2170873" cy="219075"/>
+          </a:xfrm>
+          <a:prstGeom prst="rect">
+            <a:avLst/>
+          </a:prstGeom>
+          <a:solidFill>
+            <a:schemeClr val="bg1"/>
+          </a:solidFill>
+          <a:ln>
+            <a:noFill/>
+          </a:ln>
+        </p:spPr>
+        <p:style>
+          <a:lnRef idx="2">
+            <a:schemeClr val="accent1">
+              <a:shade val="15000"/>
+            </a:schemeClr>
+          </a:lnRef>
+          <a:fillRef idx="1">
+            <a:schemeClr val="accent1"/>
+          </a:fillRef>
+          <a:effectRef idx="0">
+            <a:schemeClr val="accent1"/>
+          </a:effectRef>
+          <a:fontRef idx="minor">
+            <a:schemeClr val="lt1"/>
+          </a:fontRef>
+        </p:style>
+        <p:txBody>
+          <a:bodyPr rtlCol="0" anchor="ctr"/>
+          <a:lstStyle/>
+          <a:p>
+            <a:pPr algn="ctr"/>
+            <a:endParaRPr lang="ko-KR" altLang="en-US"/>
+          </a:p>
+        </p:txBody>
+      </p:sp>
+      <p:pic>
+        <p:nvPicPr>
+          <p:cNvPr id="74" name="그림 73">
+            <a:extLst>
+              <a:ext uri="{FF2B5EF4-FFF2-40B4-BE49-F238E27FC236}">
+                <a16:creationId xmlns:a16="http://schemas.microsoft.com/office/drawing/2014/main" id="{A5F2ABE1-0DC1-881B-D944-5FD1AC71164B}"/>
+              </a:ext>
+            </a:extLst>
+          </p:cNvPr>
+          <p:cNvPicPr>
+            <a:picLocks noChangeAspect="1"/>
+          </p:cNvPicPr>
+          <p:nvPr/>
+        </p:nvPicPr>
+        <p:blipFill>
           <a:blip r:embed="rId5"/>
           <a:stretch>
             <a:fillRect/>
@@ -7099,8 +6956,8 @@
         </p:blipFill>
         <p:spPr>
           <a:xfrm>
-            <a:off x="686844" y="1663669"/>
-            <a:ext cx="2267909" cy="4694327"/>
+            <a:off x="3517074" y="1663669"/>
+            <a:ext cx="2261812" cy="4694327"/>
           </a:xfrm>
           <a:prstGeom prst="rect">
             <a:avLst/>
@@ -11737,43 +11594,6 @@
           </a:p>
         </p:txBody>
       </p:sp>
-      <p:pic>
-        <p:nvPicPr>
-          <p:cNvPr id="13" name="그림 12">
-            <a:extLst>
-              <a:ext uri="{FF2B5EF4-FFF2-40B4-BE49-F238E27FC236}">
-                <a16:creationId xmlns:a16="http://schemas.microsoft.com/office/drawing/2014/main" id="{C64F8F35-B048-B701-B10F-2B72A537825F}"/>
-              </a:ext>
-            </a:extLst>
-          </p:cNvPr>
-          <p:cNvPicPr>
-            <a:picLocks noChangeAspect="1"/>
-          </p:cNvPicPr>
-          <p:nvPr/>
-        </p:nvPicPr>
-        <p:blipFill>
-          <a:blip r:embed="rId4">
-            <a:extLst>
-              <a:ext uri="{28A0092B-C50C-407E-A947-70E740481C1C}">
-                <a14:useLocalDpi xmlns:a14="http://schemas.microsoft.com/office/drawing/2010/main" val="0"/>
-              </a:ext>
-            </a:extLst>
-          </a:blip>
-          <a:srcRect l="27310" t="14186" r="34324" b="13499"/>
-          <a:stretch>
-            <a:fillRect/>
-          </a:stretch>
-        </p:blipFill>
-        <p:spPr>
-          <a:xfrm>
-            <a:off x="3306544" y="1473948"/>
-            <a:ext cx="2682875" cy="5056791"/>
-          </a:xfrm>
-          <a:prstGeom prst="rect">
-            <a:avLst/>
-          </a:prstGeom>
-        </p:spPr>
-      </p:pic>
       <p:sp>
         <p:nvSpPr>
           <p:cNvPr id="14" name="TextBox 13">
@@ -12762,6 +12582,36 @@
           </a:p>
         </p:txBody>
       </p:sp>
+      <p:pic>
+        <p:nvPicPr>
+          <p:cNvPr id="2" name="그림 1">
+            <a:extLst>
+              <a:ext uri="{FF2B5EF4-FFF2-40B4-BE49-F238E27FC236}">
+                <a16:creationId xmlns:a16="http://schemas.microsoft.com/office/drawing/2014/main" id="{9A2AEE54-C5DA-7B41-02B9-AE1865FE7FCC}"/>
+              </a:ext>
+            </a:extLst>
+          </p:cNvPr>
+          <p:cNvPicPr>
+            <a:picLocks noChangeAspect="1"/>
+          </p:cNvPicPr>
+          <p:nvPr/>
+        </p:nvPicPr>
+        <p:blipFill>
+          <a:blip r:embed="rId9"/>
+          <a:stretch>
+            <a:fillRect/>
+          </a:stretch>
+        </p:blipFill>
+        <p:spPr>
+          <a:xfrm>
+            <a:off x="-3011591" y="6505297"/>
+            <a:ext cx="782994" cy="291540"/>
+          </a:xfrm>
+          <a:prstGeom prst="rect">
+            <a:avLst/>
+          </a:prstGeom>
+        </p:spPr>
+      </p:pic>
     </p:spTree>
     <p:extLst>
       <p:ext uri="{BB962C8B-B14F-4D97-AF65-F5344CB8AC3E}">
@@ -13406,12 +13256,16 @@
 </file>
 
 <file path=customXml/item1.xml><?xml version="1.0" encoding="utf-8"?>
-<?mso-contentType ?>
-<FormTemplates xmlns="http://schemas.microsoft.com/sharepoint/v3/contenttype/forms">
-  <Display>DocumentLibraryForm</Display>
-  <Edit>DocumentLibraryForm</Edit>
-  <New>DocumentLibraryForm</New>
-</FormTemplates>
+<p:properties xmlns:p="http://schemas.microsoft.com/office/2006/metadata/properties" xmlns:xsi="http://www.w3.org/2001/XMLSchema-instance" xmlns:pc="http://schemas.microsoft.com/office/infopath/2007/PartnerControls">
+  <documentManagement>
+    <_xc81c__xc791__xb144__xb3c4_ xmlns="65f7bd14-20ef-479f-9d36-31b77f8ca2dc">2025년</_xc81c__xc791__xb144__xb3c4_>
+    <TaxCatchAll xmlns="2c0ba3d7-3df1-4fee-9830-f283e249846b" xsi:nil="true"/>
+    <lcf76f155ced4ddcb4097134ff3c332f xmlns="65f7bd14-20ef-479f-9d36-31b77f8ca2dc">
+      <Terms xmlns="http://schemas.microsoft.com/office/infopath/2007/PartnerControls"/>
+    </lcf76f155ced4ddcb4097134ff3c332f>
+    <_xd30c__xc77c__xc124__xba85_ xmlns="65f7bd14-20ef-479f-9d36-31b77f8ca2dc" xsi:nil="true"/>
+  </documentManagement>
+</p:properties>
 </file>
 
 <file path=customXml/item2.xml><?xml version="1.0" encoding="utf-8"?>
@@ -13644,22 +13498,27 @@
 </file>
 
 <file path=customXml/item3.xml><?xml version="1.0" encoding="utf-8"?>
-<p:properties xmlns:p="http://schemas.microsoft.com/office/2006/metadata/properties" xmlns:xsi="http://www.w3.org/2001/XMLSchema-instance" xmlns:pc="http://schemas.microsoft.com/office/infopath/2007/PartnerControls">
-  <documentManagement>
-    <_xc81c__xc791__xb144__xb3c4_ xmlns="65f7bd14-20ef-479f-9d36-31b77f8ca2dc">2025년</_xc81c__xc791__xb144__xb3c4_>
-    <TaxCatchAll xmlns="2c0ba3d7-3df1-4fee-9830-f283e249846b" xsi:nil="true"/>
-    <lcf76f155ced4ddcb4097134ff3c332f xmlns="65f7bd14-20ef-479f-9d36-31b77f8ca2dc">
-      <Terms xmlns="http://schemas.microsoft.com/office/infopath/2007/PartnerControls"/>
-    </lcf76f155ced4ddcb4097134ff3c332f>
-    <_xd30c__xc77c__xc124__xba85_ xmlns="65f7bd14-20ef-479f-9d36-31b77f8ca2dc" xsi:nil="true"/>
-  </documentManagement>
-</p:properties>
+<?mso-contentType ?>
+<FormTemplates xmlns="http://schemas.microsoft.com/sharepoint/v3/contenttype/forms">
+  <Display>DocumentLibraryForm</Display>
+  <Edit>DocumentLibraryForm</Edit>
+  <New>DocumentLibraryForm</New>
+</FormTemplates>
 </file>
 
 <file path=customXml/itemProps1.xml><?xml version="1.0" encoding="utf-8"?>
-<ds:datastoreItem xmlns:ds="http://schemas.openxmlformats.org/officeDocument/2006/customXml" ds:itemID="{F29EA140-0B70-4C84-BFBD-81F38940E70C}">
+<ds:datastoreItem xmlns:ds="http://schemas.openxmlformats.org/officeDocument/2006/customXml" ds:itemID="{D5BAD8F3-29D0-4305-BEE0-AAA2E3EF38BE}">
   <ds:schemaRefs>
-    <ds:schemaRef ds:uri="http://schemas.microsoft.com/sharepoint/v3/contenttype/forms"/>
+    <ds:schemaRef ds:uri="http://schemas.microsoft.com/office/2006/documentManagement/types"/>
+    <ds:schemaRef ds:uri="http://www.w3.org/XML/1998/namespace"/>
+    <ds:schemaRef ds:uri="65f7bd14-20ef-479f-9d36-31b77f8ca2dc"/>
+    <ds:schemaRef ds:uri="http://purl.org/dc/dcmitype/"/>
+    <ds:schemaRef ds:uri="http://purl.org/dc/elements/1.1/"/>
+    <ds:schemaRef ds:uri="http://schemas.openxmlformats.org/package/2006/metadata/core-properties"/>
+    <ds:schemaRef ds:uri="http://schemas.microsoft.com/office/infopath/2007/PartnerControls"/>
+    <ds:schemaRef ds:uri="2c0ba3d7-3df1-4fee-9830-f283e249846b"/>
+    <ds:schemaRef ds:uri="http://schemas.microsoft.com/office/2006/metadata/properties"/>
+    <ds:schemaRef ds:uri="http://purl.org/dc/terms/"/>
   </ds:schemaRefs>
 </ds:datastoreItem>
 </file>
@@ -13684,18 +13543,9 @@
 </file>
 
 <file path=customXml/itemProps3.xml><?xml version="1.0" encoding="utf-8"?>
-<ds:datastoreItem xmlns:ds="http://schemas.openxmlformats.org/officeDocument/2006/customXml" ds:itemID="{D5BAD8F3-29D0-4305-BEE0-AAA2E3EF38BE}">
+<ds:datastoreItem xmlns:ds="http://schemas.openxmlformats.org/officeDocument/2006/customXml" ds:itemID="{F29EA140-0B70-4C84-BFBD-81F38940E70C}">
   <ds:schemaRefs>
-    <ds:schemaRef ds:uri="http://schemas.microsoft.com/office/2006/documentManagement/types"/>
-    <ds:schemaRef ds:uri="http://www.w3.org/XML/1998/namespace"/>
-    <ds:schemaRef ds:uri="65f7bd14-20ef-479f-9d36-31b77f8ca2dc"/>
-    <ds:schemaRef ds:uri="http://purl.org/dc/dcmitype/"/>
-    <ds:schemaRef ds:uri="http://purl.org/dc/elements/1.1/"/>
-    <ds:schemaRef ds:uri="http://schemas.openxmlformats.org/package/2006/metadata/core-properties"/>
-    <ds:schemaRef ds:uri="http://schemas.microsoft.com/office/infopath/2007/PartnerControls"/>
-    <ds:schemaRef ds:uri="2c0ba3d7-3df1-4fee-9830-f283e249846b"/>
-    <ds:schemaRef ds:uri="http://schemas.microsoft.com/office/2006/metadata/properties"/>
-    <ds:schemaRef ds:uri="http://purl.org/dc/terms/"/>
+    <ds:schemaRef ds:uri="http://schemas.microsoft.com/sharepoint/v3/contenttype/forms"/>
   </ds:schemaRefs>
 </ds:datastoreItem>
 </file>